--- a/assets/powerpoints/module-n2-classe/A2-la-fin-des-mots-le-son-e.pptx
+++ b/assets/powerpoints/module-n2-classe/A2-la-fin-des-mots-le-son-e.pptx
@@ -7824,7 +7824,169 @@
                 </a:solidFill>
                 <a:latin typeface="Verdana"/>
               </a:rPr>
-              <a:t>Toutes les consignes de la classe finissent ainsi : ouvr&lt;b&gt;ez&lt;/b&gt;, ferm&lt;b&gt;ez&lt;/b&gt;, écout&lt;b&gt;ez&lt;/b&gt;, pren&lt;b&gt;ez&lt;/b&gt;, écriv&lt;b&gt;ez&lt;/b&gt;. Les lettres &lt;b&gt;-er&lt;/b&gt; et &lt;b&gt;-é&lt;/b&gt; font le même son : effac&lt;b&gt;er&lt;/b&gt;, la cl&lt;b&gt;é&lt;/b&gt;.</a:t>
+              <a:t>Toutes les consignes de la classe finissent ainsi : ouvr</a:t>
+            </a:r>
+            <a:r>
+              <a:rPr sz="2000" b="1" i="0">
+                <a:solidFill>
+                  <a:srgbClr val="4B4F52"/>
+                </a:solidFill>
+                <a:latin typeface="Verdana"/>
+              </a:rPr>
+              <a:t>ez</a:t>
+            </a:r>
+            <a:r>
+              <a:rPr sz="2000" b="0" i="0">
+                <a:solidFill>
+                  <a:srgbClr val="4B4F52"/>
+                </a:solidFill>
+                <a:latin typeface="Verdana"/>
+              </a:rPr>
+              <a:t>, ferm</a:t>
+            </a:r>
+            <a:r>
+              <a:rPr sz="2000" b="1" i="0">
+                <a:solidFill>
+                  <a:srgbClr val="4B4F52"/>
+                </a:solidFill>
+                <a:latin typeface="Verdana"/>
+              </a:rPr>
+              <a:t>ez</a:t>
+            </a:r>
+            <a:r>
+              <a:rPr sz="2000" b="0" i="0">
+                <a:solidFill>
+                  <a:srgbClr val="4B4F52"/>
+                </a:solidFill>
+                <a:latin typeface="Verdana"/>
+              </a:rPr>
+              <a:t>, écout</a:t>
+            </a:r>
+            <a:r>
+              <a:rPr sz="2000" b="1" i="0">
+                <a:solidFill>
+                  <a:srgbClr val="4B4F52"/>
+                </a:solidFill>
+                <a:latin typeface="Verdana"/>
+              </a:rPr>
+              <a:t>ez</a:t>
+            </a:r>
+            <a:r>
+              <a:rPr sz="2000" b="0" i="0">
+                <a:solidFill>
+                  <a:srgbClr val="4B4F52"/>
+                </a:solidFill>
+                <a:latin typeface="Verdana"/>
+              </a:rPr>
+              <a:t>, pren</a:t>
+            </a:r>
+            <a:r>
+              <a:rPr sz="2000" b="1" i="0">
+                <a:solidFill>
+                  <a:srgbClr val="4B4F52"/>
+                </a:solidFill>
+                <a:latin typeface="Verdana"/>
+              </a:rPr>
+              <a:t>ez</a:t>
+            </a:r>
+            <a:r>
+              <a:rPr sz="2000" b="0" i="0">
+                <a:solidFill>
+                  <a:srgbClr val="4B4F52"/>
+                </a:solidFill>
+                <a:latin typeface="Verdana"/>
+              </a:rPr>
+              <a:t>, écriv</a:t>
+            </a:r>
+            <a:r>
+              <a:rPr sz="2000" b="1" i="0">
+                <a:solidFill>
+                  <a:srgbClr val="4B4F52"/>
+                </a:solidFill>
+                <a:latin typeface="Verdana"/>
+              </a:rPr>
+              <a:t>ez</a:t>
+            </a:r>
+            <a:r>
+              <a:rPr sz="2000" b="0" i="0">
+                <a:solidFill>
+                  <a:srgbClr val="4B4F52"/>
+                </a:solidFill>
+                <a:latin typeface="Verdana"/>
+              </a:rPr>
+              <a:t>. Les lettres </a:t>
+            </a:r>
+            <a:r>
+              <a:rPr sz="2000" b="1" i="0">
+                <a:solidFill>
+                  <a:srgbClr val="4B4F52"/>
+                </a:solidFill>
+                <a:latin typeface="Verdana"/>
+              </a:rPr>
+              <a:t>-er</a:t>
+            </a:r>
+            <a:r>
+              <a:rPr sz="2000" b="0" i="0">
+                <a:solidFill>
+                  <a:srgbClr val="4B4F52"/>
+                </a:solidFill>
+                <a:latin typeface="Verdana"/>
+              </a:rPr>
+              <a:t> et </a:t>
+            </a:r>
+            <a:r>
+              <a:rPr sz="2000" b="1" i="0">
+                <a:solidFill>
+                  <a:srgbClr val="4B4F52"/>
+                </a:solidFill>
+                <a:latin typeface="Verdana"/>
+              </a:rPr>
+              <a:t>-é</a:t>
+            </a:r>
+            <a:r>
+              <a:rPr sz="2000" b="0" i="0">
+                <a:solidFill>
+                  <a:srgbClr val="4B4F52"/>
+                </a:solidFill>
+                <a:latin typeface="Verdana"/>
+              </a:rPr>
+              <a:t> font le même son : effac</a:t>
+            </a:r>
+            <a:r>
+              <a:rPr sz="2000" b="1" i="0">
+                <a:solidFill>
+                  <a:srgbClr val="4B4F52"/>
+                </a:solidFill>
+                <a:latin typeface="Verdana"/>
+              </a:rPr>
+              <a:t>er</a:t>
+            </a:r>
+            <a:r>
+              <a:rPr sz="2000" b="0" i="0">
+                <a:solidFill>
+                  <a:srgbClr val="4B4F52"/>
+                </a:solidFill>
+                <a:latin typeface="Verdana"/>
+              </a:rPr>
+              <a:t>, la cl</a:t>
+            </a:r>
+            <a:r>
+              <a:rPr sz="2000" b="1" i="0">
+                <a:solidFill>
+                  <a:srgbClr val="4B4F52"/>
+                </a:solidFill>
+                <a:latin typeface="Verdana"/>
+              </a:rPr>
+              <a:t>é</a:t>
+            </a:r>
+            <a:r>
+              <a:rPr sz="2000" b="0" i="0">
+                <a:solidFill>
+                  <a:srgbClr val="4B4F52"/>
+                </a:solidFill>
+                <a:latin typeface="Verdana"/>
+              </a:rPr>
+              <a:t>.</a:t>
             </a:r>
           </a:p>
         </p:txBody>
